--- a/system-design-101/vi/lessons/sd-11-015/slides/sd-11-015.pptx
+++ b/system-design-101/vi/lessons/sd-11-015/slides/sd-11-015.pptx
@@ -1864,7 +1864,7 @@
               <a:t> báo</a:t>
             </a:r>
             <a:r>
-              <a:rPr lang="en-US" sz="5400" dirty="0" spc="-2" kern="0">
+              <a:rPr lang="en-US" sz="5400" dirty="0" spc="10" kern="0">
                 <a:solidFill>
                   <a:srgbClr val="F3EEE3"/>
                 </a:solidFill>
@@ -1872,10 +1872,10 @@
                 <a:ea typeface="Bricolage Grotesque ExtraBold" pitchFamily="34" charset="-122"/>
                 <a:cs typeface="Bricolage Grotesque ExtraBold" pitchFamily="34" charset="-120"/>
               </a:rPr>
-              <a:t> kinh</a:t>
-            </a:r>
-            <a:r>
-              <a:rPr lang="en-US" sz="5400" dirty="0" spc="19" kern="0">
+              <a:t> đã</a:t>
+            </a:r>
+            <a:r>
+              <a:rPr lang="en-US" sz="5400" dirty="0" spc="16" kern="0">
                 <a:solidFill>
                   <a:srgbClr val="F3EEE3"/>
                 </a:solidFill>
@@ -1883,10 +1883,10 @@
                 <a:ea typeface="Bricolage Grotesque ExtraBold" pitchFamily="34" charset="-122"/>
                 <a:cs typeface="Bricolage Grotesque ExtraBold" pitchFamily="34" charset="-120"/>
               </a:rPr>
-              <a:t> điển</a:t>
-            </a:r>
-            <a:r>
-              <a:rPr lang="en-US" sz="5400" dirty="0" spc="-55" kern="0">
+              <a:t> định</a:t>
+            </a:r>
+            <a:r>
+              <a:rPr lang="en-US" sz="5400" dirty="0" spc="-14" kern="0">
                 <a:solidFill>
                   <a:srgbClr val="F3EEE3"/>
                 </a:solidFill>
@@ -1894,10 +1894,10 @@
                 <a:ea typeface="Bricolage Grotesque ExtraBold" pitchFamily="34" charset="-122"/>
                 <a:cs typeface="Bricolage Grotesque ExtraBold" pitchFamily="34" charset="-120"/>
               </a:rPr>
-              <a:t> về</a:t>
-            </a:r>
-            <a:r>
-              <a:rPr lang="en-US" sz="5400" dirty="0" spc="-3" kern="0">
+              <a:t> hình</a:t>
+            </a:r>
+            <a:r>
+              <a:rPr lang="en-US" sz="5400" dirty="0" spc="-11" kern="0">
                 <a:solidFill>
                   <a:srgbClr val="F3EEE3"/>
                 </a:solidFill>
@@ -1905,10 +1905,10 @@
                 <a:ea typeface="Bricolage Grotesque ExtraBold" pitchFamily="34" charset="-122"/>
                 <a:cs typeface="Bricolage Grotesque ExtraBold" pitchFamily="34" charset="-120"/>
               </a:rPr>
-              <a:t> hệ</a:t>
-            </a:r>
-            <a:r>
-              <a:rPr lang="en-US" sz="5400" dirty="0" spc="-1" kern="0">
+              <a:t> ngành</a:t>
+            </a:r>
+            <a:r>
+              <a:rPr lang="en-US" sz="5400" dirty="0" spc="-3" kern="0">
                 <a:solidFill>
                   <a:srgbClr val="F3EEE3"/>
                 </a:solidFill>
@@ -1916,10 +1916,10 @@
                 <a:ea typeface="Bricolage Grotesque ExtraBold" pitchFamily="34" charset="-122"/>
                 <a:cs typeface="Bricolage Grotesque ExtraBold" pitchFamily="34" charset="-120"/>
               </a:rPr>
-              <a:t> thống phân</a:t>
-            </a:r>
-            <a:r>
-              <a:rPr lang="en-US" sz="5400" dirty="0" spc="-5" kern="0">
+              <a:t> máy</a:t>
+            </a:r>
+            <a:r>
+              <a:rPr lang="en-US" sz="5400" dirty="0" spc="0" kern="0">
                 <a:solidFill>
                   <a:srgbClr val="F3EEE3"/>
                 </a:solidFill>
@@ -1927,10 +1927,10 @@
                 <a:ea typeface="Bricolage Grotesque ExtraBold" pitchFamily="34" charset="-122"/>
                 <a:cs typeface="Bricolage Grotesque ExtraBold" pitchFamily="34" charset="-120"/>
               </a:rPr>
-              <a:t> tán,</a:t>
-            </a:r>
-            <a:r>
-              <a:rPr lang="en-US" sz="5400" dirty="0" spc="-64" kern="0">
+              <a:t> tính,</a:t>
+            </a:r>
+            <a:r>
+              <a:rPr lang="en-US" sz="5400" dirty="0" spc="-65" kern="0">
                 <a:solidFill>
                   <a:srgbClr val="F3EEE3"/>
                 </a:solidFill>
@@ -2106,7 +2106,7 @@
       </p:sp>
       <p:sp>
         <p:nvSpPr>
-          <p:cNvPr id="5" name="Connector line-1792423218031-871978412"/>
+          <p:cNvPr id="5" name="Connector line-1792425202968-761598658"/>
           <p:cNvSpPr/>
           <p:nvPr/>
         </p:nvSpPr>
